--- a/assets/ArogyaAegis_SIH26181.pptx
+++ b/assets/ArogyaAegis_SIH26181.pptx
@@ -3810,7 +3810,7 @@
                 </a:solidFill>
                 <a:latin typeface="Calibri"/>
               </a:rPr>
-              <a:t> is a smart vest (SereniSuit v2) with 9 body and environment sensors and an ESP32-S3 running </a:t>
+              <a:t> is a smart vest with 9 body and environment sensors and an ESP32-S3 running </a:t>
             </a:r>
             <a:r>
               <a:rPr sz="1080" b="1" i="0">
@@ -5608,7 +5608,7 @@
                 </a:solidFill>
                 <a:latin typeface="Calibri"/>
               </a:rPr>
-              <a:t>1D-CNN on GSR + PPG + IMU windows (existing SereniSuit model).</a:t>
+              <a:t>1D-CNN on GSR + PPG + IMU windows (our existing stress model).</a:t>
             </a:r>
           </a:p>
           <a:p>
